--- a/Topic_A/Exam_Practice/AT-A-L05_Writing_Workshop_Eating_Out_Cafe_Menu_and_Prices.pptx
+++ b/Topic_A/Exam_Practice/AT-A-L05_Writing_Workshop_Eating_Out_Cafe_Menu_and_Prices.pptx
@@ -784,7 +784,11 @@
           <a:lstStyle/>
           <a:p>
             <a:r>
-              <a:rPr lang="en-US" dirty="0"/>
+              <a:rPr lang="ar-SA" dirty="0">
+                <a:latin typeface="Amiri" pitchFamily="2" charset="-78"/>
+                <a:ea typeface="Amiri" pitchFamily="2" charset="-78"/>
+                <a:cs typeface="Amiri" pitchFamily="2" charset="-78"/>
+              </a:rPr>
               <a:t>Q3 (3 min to choose and read). Title (أ) suits Core and Develop; title (ب) suits Stretch.</a:t>
             </a:r>
             <a:endParaRPr lang="en-US" dirty="0"/>
@@ -1403,7 +1407,11 @@
           <a:lstStyle/>
           <a:p>
             <a:r>
-              <a:rPr lang="en-US" dirty="0"/>
+              <a:rPr lang="ar-SA" dirty="0">
+                <a:latin typeface="Amiri" pitchFamily="2" charset="-78"/>
+                <a:ea typeface="Amiri" pitchFamily="2" charset="-78"/>
+                <a:cs typeface="Amiri" pitchFamily="2" charset="-78"/>
+              </a:rPr>
               <a:t>WELCOME (1 min) — while students join.
 • Greet each student by name as they arrive: السَّلَامُ عَلَيْكُمْ. Take the register (Pastoral Tracker: attendance 0/1).
 • 2-MINUTE CHECK-IN (SEND training): a private chat to any student who seemed unsettled last lesson — “Are you okay today? 👍 / 👎”.
@@ -1672,7 +1680,11 @@
           <a:lstStyle/>
           <a:p>
             <a:r>
-              <a:rPr lang="en-US" dirty="0"/>
+              <a:rPr lang="ar-SA" dirty="0">
+                <a:latin typeface="Amiri" pitchFamily="2" charset="-78"/>
+                <a:ea typeface="Amiri" pitchFamily="2" charset="-78"/>
+                <a:cs typeface="Amiri" pitchFamily="2" charset="-78"/>
+              </a:rPr>
               <a:t>QUESTION 1 — FORM FILLING. About 8 minutes. Core: boxes 1–6. Develop / Stretch: all 8. Numbers: أَرْبَعَةُ أَشْخَاصٍ (3–10), ثَلَاثُونَ جُنَيْهًا (11+).</a:t>
             </a:r>
             <a:endParaRPr lang="en-US" dirty="0"/>
@@ -1936,7 +1948,11 @@
           <a:lstStyle/>
           <a:p>
             <a:r>
-              <a:rPr lang="en-US" dirty="0"/>
+              <a:rPr lang="ar-SA" dirty="0">
+                <a:latin typeface="Amiri" pitchFamily="2" charset="-78"/>
+                <a:ea typeface="Amiri" pitchFamily="2" charset="-78"/>
+                <a:cs typeface="Amiri" pitchFamily="2" charset="-78"/>
+              </a:rPr>
               <a:t>Question words: أَيْنَ (where) · مَتَى (when) · مَعَ مَنْ (with whom) · كَمْ (how much) — bullets 1–3 are in the PAST, bullet 4 in the FUTURE.</a:t>
             </a:r>
             <a:endParaRPr lang="en-US" dirty="0"/>
@@ -2508,6 +2524,7 @@
                   <a:srgbClr val="D4AF37"/>
                 </a:solidFill>
                 <a:latin typeface="Amiri" pitchFamily="2" charset="-78"/>
+                <a:ea typeface="Amiri" pitchFamily="2" charset="-78"/>
                 <a:cs typeface="Amiri" pitchFamily="2" charset="-78"/>
               </a:rPr>
               <a:t>م</a:t>
@@ -2714,6 +2731,7 @@
                   <a:srgbClr val="D4AF37"/>
                 </a:solidFill>
                 <a:latin typeface="Amiri" pitchFamily="2" charset="-78"/>
+                <a:ea typeface="Amiri" pitchFamily="2" charset="-78"/>
                 <a:cs typeface="Amiri" pitchFamily="2" charset="-78"/>
               </a:rPr>
               <a:t>وَرْشَةُ الكِتَابَةِ — فِي المَطْعَمِ وَالمَقْهَى</a:t>
@@ -3171,6 +3189,7 @@
                   <a:srgbClr val="D4AF37"/>
                 </a:solidFill>
                 <a:latin typeface="Amiri" pitchFamily="2" charset="-78"/>
+                <a:ea typeface="Amiri" pitchFamily="2" charset="-78"/>
                 <a:cs typeface="Amiri" pitchFamily="2" charset="-78"/>
               </a:rPr>
               <a:t>م</a:t>
@@ -3491,6 +3510,7 @@
                   <a:srgbClr val="8A6D1E"/>
                 </a:solidFill>
                 <a:latin typeface="Amiri" pitchFamily="2" charset="-78"/>
+                <a:ea typeface="Amiri" pitchFamily="2" charset="-78"/>
                 <a:cs typeface="Amiri" pitchFamily="2" charset="-78"/>
               </a:rPr>
               <a:t>نَمُوذَجُ الإِجَابَةِ</a:t>
@@ -3604,6 +3624,7 @@
                   <a:srgbClr val="1F2A37"/>
                 </a:solidFill>
                 <a:latin typeface="Amiri" pitchFamily="2" charset="-78"/>
+                <a:ea typeface="Amiri" pitchFamily="2" charset="-78"/>
                 <a:cs typeface="Amiri" pitchFamily="2" charset="-78"/>
               </a:rPr>
               <a:t>مَرْحَبًا يَا يُوسُفُ،</a:t>
@@ -3623,6 +3644,7 @@
                   <a:srgbClr val="1F2A37"/>
                 </a:solidFill>
                 <a:latin typeface="Amiri" pitchFamily="2" charset="-78"/>
+                <a:ea typeface="Amiri" pitchFamily="2" charset="-78"/>
                 <a:cs typeface="Amiri" pitchFamily="2" charset="-78"/>
               </a:rPr>
               <a:t>كَيْفَ حَالُكَ؟ يَوْمَ السَّبْتِ ذَهَبْتُ إِلَى مَطْعَمٍ لُبْنَانِيٍّ جَدِيدٍ مَعَ أُسْرَتِي. طَلَبْتُ الحُمُّصَ وَالدَّجَاجَ المَشْوِيَّ، وَأَكَلْتُ الخُبْزَ العَرَبِيَّ، وَشَرِبْتُ عَصِيرَ لَيْمُونٍ. دَفَعْنَا خَمْسِينَ جُنَيْهًا لِأَرْبَعَةِ أَشْخَاصٍ، وَكَانَتِ الأَسْعَارُ مَعْقُولَةً. الطَّعَامُ كَانَ لَذِيذًا جِدًّا، وَالنَّادِلُ كَانَ لَطِيفًا. لٰكِنَّ المَطْعَمَ كَانَ مُزْدَحِمًا. سَأَرْجِعُ إِلَى المَطْعَمِ قَرِيبًا، وَسَأَطْلُبُ الفَلَافِلَ فِي المَرَّةِ القَادِمَةِ.</a:t>
@@ -3642,6 +3664,7 @@
                   <a:srgbClr val="1F2A37"/>
                 </a:solidFill>
                 <a:latin typeface="Amiri" pitchFamily="2" charset="-78"/>
+                <a:ea typeface="Amiri" pitchFamily="2" charset="-78"/>
                 <a:cs typeface="Amiri" pitchFamily="2" charset="-78"/>
               </a:rPr>
               <a:t>إِلَى اللِّقَاءِ،</a:t>
@@ -3661,6 +3684,7 @@
                   <a:srgbClr val="1F2A37"/>
                 </a:solidFill>
                 <a:latin typeface="Amiri" pitchFamily="2" charset="-78"/>
+                <a:ea typeface="Amiri" pitchFamily="2" charset="-78"/>
                 <a:cs typeface="Amiri" pitchFamily="2" charset="-78"/>
               </a:rPr>
               <a:t>آدَمُ</a:t>
@@ -3824,11 +3848,12 @@
               <a:buNone/>
             </a:pPr>
             <a:r>
-              <a:rPr lang="en-US" sz="950" b="1" dirty="0">
+              <a:rPr lang="ar-SA" sz="950" b="1" dirty="0">
                 <a:solidFill>
                   <a:srgbClr val="FFFFFF"/>
                 </a:solidFill>
                 <a:latin typeface="Calibri" pitchFamily="34" charset="0"/>
+                <a:ea typeface="Amiri" pitchFamily="2" charset="-78"/>
                 <a:cs typeface="Amiri" pitchFamily="2" charset="-78"/>
               </a:rPr>
               <a:t>ذَهَبْتُ</a:t>
@@ -3889,11 +3914,12 @@
               <a:buNone/>
             </a:pPr>
             <a:r>
-              <a:rPr lang="en-US" sz="950" b="1" dirty="0">
+              <a:rPr lang="ar-SA" sz="950" b="1" dirty="0">
                 <a:solidFill>
                   <a:srgbClr val="FFFFFF"/>
                 </a:solidFill>
                 <a:latin typeface="Calibri" pitchFamily="34" charset="0"/>
+                <a:ea typeface="Amiri" pitchFamily="2" charset="-78"/>
                 <a:cs typeface="Amiri" pitchFamily="2" charset="-78"/>
               </a:rPr>
               <a:t>طَلَبْتُ</a:t>
@@ -3954,11 +3980,12 @@
               <a:buNone/>
             </a:pPr>
             <a:r>
-              <a:rPr lang="en-US" sz="950" b="1" dirty="0">
+              <a:rPr lang="ar-SA" sz="950" b="1" dirty="0">
                 <a:solidFill>
                   <a:srgbClr val="FFFFFF"/>
                 </a:solidFill>
                 <a:latin typeface="Calibri" pitchFamily="34" charset="0"/>
+                <a:ea typeface="Amiri" pitchFamily="2" charset="-78"/>
                 <a:cs typeface="Amiri" pitchFamily="2" charset="-78"/>
               </a:rPr>
               <a:t>دَفَعْنَا</a:t>
@@ -4019,11 +4046,12 @@
               <a:buNone/>
             </a:pPr>
             <a:r>
-              <a:rPr lang="en-US" sz="950" b="1" dirty="0">
+              <a:rPr lang="ar-SA" sz="950" b="1" dirty="0">
                 <a:solidFill>
                   <a:srgbClr val="FFFFFF"/>
                 </a:solidFill>
                 <a:latin typeface="Calibri" pitchFamily="34" charset="0"/>
+                <a:ea typeface="Amiri" pitchFamily="2" charset="-78"/>
                 <a:cs typeface="Amiri" pitchFamily="2" charset="-78"/>
               </a:rPr>
               <a:t>سَأَرْجِعُ</a:t>
@@ -4157,6 +4185,7 @@
                   <a:srgbClr val="D4AF37"/>
                 </a:solidFill>
                 <a:latin typeface="Amiri" pitchFamily="2" charset="-78"/>
+                <a:ea typeface="Amiri" pitchFamily="2" charset="-78"/>
                 <a:cs typeface="Amiri" pitchFamily="2" charset="-78"/>
               </a:rPr>
               <a:t>م</a:t>
@@ -4477,6 +4506,7 @@
                   <a:srgbClr val="8A6D1E"/>
                 </a:solidFill>
                 <a:latin typeface="Amiri" pitchFamily="2" charset="-78"/>
+                <a:ea typeface="Amiri" pitchFamily="2" charset="-78"/>
                 <a:cs typeface="Amiri" pitchFamily="2" charset="-78"/>
               </a:rPr>
               <a:t>نَمُوذَجُ الإِجَابَةِ</a:t>
@@ -4590,6 +4620,7 @@
                   <a:srgbClr val="1F2A37"/>
                 </a:solidFill>
                 <a:latin typeface="Amiri" pitchFamily="2" charset="-78"/>
+                <a:ea typeface="Amiri" pitchFamily="2" charset="-78"/>
                 <a:cs typeface="Amiri" pitchFamily="2" charset="-78"/>
               </a:rPr>
               <a:t>مَرْحَبًا يَا يُوسُفُ،</a:t>
@@ -4609,6 +4640,7 @@
                   <a:srgbClr val="1F2A37"/>
                 </a:solidFill>
                 <a:latin typeface="Amiri" pitchFamily="2" charset="-78"/>
+                <a:ea typeface="Amiri" pitchFamily="2" charset="-78"/>
                 <a:cs typeface="Amiri" pitchFamily="2" charset="-78"/>
               </a:rPr>
               <a:t>كَيْفَ حَالُكَ؟ أُرِيدُ أَنْ أُخْبِرَكَ عَنْ مَطْعَمٍ رَائِعٍ. يَوْمَ السَّبْتِ المَاضِي ذَهَبْتُ مَعَ أُسْرَتِي إِلَى مَطْعَمٍ لُبْنَانِيٍّ جَدِيدٍ فِي وَسَطِ المَدِينَةِ، بِمُنَاسَبَةِ نَجَاحِ أُخْتِي. طَلَبْتُ الحُمُّصَ وَالدَّجَاجَ المَشْوِيَّ مَعَ الأُرْزِ، وَشَرِبْتُ عَصِيرَ لَيْمُونٍ بِالنَّعْنَاعِ. دَفَعْنَا خَمْسِينَ جُنَيْهًا لِأَرْبَعَةِ أَشْخَاصٍ، وَهٰذَا سِعْرٌ مَعْقُولٌ. وَأَكَلْنَا الكُنَافَةَ فِي النِّهَايَةِ. فِي رَأْيِي كَانَ الطَّعَامُ طَازَجًا وَلَذِيذًا جِدًّا، وَكَانَ النَّادِلُ لَطِيفًا وَسَرِيعًا، لٰكِنَّ المَكَانَ كَانَ مُزْدَحِمًا وَصَاخِبًا قَلِيلًا. سَأَرْجِعُ إِلَيْهِ بِالتَّأْكِيدِ، وَفِي المَرَّةِ القَادِمَةِ سَأُجَرِّبُ الفَلَافِلَ. هَلْ تُرِيدُ أَنْ تَأْتِيَ مَعَنَا؟</a:t>
@@ -4628,6 +4660,7 @@
                   <a:srgbClr val="1F2A37"/>
                 </a:solidFill>
                 <a:latin typeface="Amiri" pitchFamily="2" charset="-78"/>
+                <a:ea typeface="Amiri" pitchFamily="2" charset="-78"/>
                 <a:cs typeface="Amiri" pitchFamily="2" charset="-78"/>
               </a:rPr>
               <a:t>مَعَ تَحِيَّاتِي،</a:t>
@@ -4647,6 +4680,7 @@
                   <a:srgbClr val="1F2A37"/>
                 </a:solidFill>
                 <a:latin typeface="Amiri" pitchFamily="2" charset="-78"/>
+                <a:ea typeface="Amiri" pitchFamily="2" charset="-78"/>
                 <a:cs typeface="Amiri" pitchFamily="2" charset="-78"/>
               </a:rPr>
               <a:t>آدَمُ</a:t>
@@ -4810,11 +4844,12 @@
               <a:buNone/>
             </a:pPr>
             <a:r>
-              <a:rPr lang="en-US" sz="950" b="1" dirty="0">
+              <a:rPr lang="ar-SA" sz="950" b="1" dirty="0">
                 <a:solidFill>
                   <a:srgbClr val="FFFFFF"/>
                 </a:solidFill>
                 <a:latin typeface="Calibri" pitchFamily="34" charset="0"/>
+                <a:ea typeface="Amiri" pitchFamily="2" charset="-78"/>
                 <a:cs typeface="Amiri" pitchFamily="2" charset="-78"/>
               </a:rPr>
               <a:t>بِمُنَاسَبَةِ</a:t>
@@ -4875,11 +4910,12 @@
               <a:buNone/>
             </a:pPr>
             <a:r>
-              <a:rPr lang="en-US" sz="950" b="1" dirty="0">
+              <a:rPr lang="ar-SA" sz="950" b="1" dirty="0">
                 <a:solidFill>
                   <a:srgbClr val="FFFFFF"/>
                 </a:solidFill>
                 <a:latin typeface="Calibri" pitchFamily="34" charset="0"/>
+                <a:ea typeface="Amiri" pitchFamily="2" charset="-78"/>
                 <a:cs typeface="Amiri" pitchFamily="2" charset="-78"/>
               </a:rPr>
               <a:t>لِأَرْبَعَةِ أَشْخَاصٍ</a:t>
@@ -4940,11 +4976,12 @@
               <a:buNone/>
             </a:pPr>
             <a:r>
-              <a:rPr lang="en-US" sz="950" b="1" dirty="0">
+              <a:rPr lang="ar-SA" sz="950" b="1" dirty="0">
                 <a:solidFill>
                   <a:srgbClr val="FFFFFF"/>
                 </a:solidFill>
                 <a:latin typeface="Calibri" pitchFamily="34" charset="0"/>
+                <a:ea typeface="Amiri" pitchFamily="2" charset="-78"/>
                 <a:cs typeface="Amiri" pitchFamily="2" charset="-78"/>
               </a:rPr>
               <a:t>لٰكِنَّ المَكَانَ</a:t>
@@ -5005,11 +5042,12 @@
               <a:buNone/>
             </a:pPr>
             <a:r>
-              <a:rPr lang="en-US" sz="950" b="1" dirty="0">
+              <a:rPr lang="ar-SA" sz="950" b="1" dirty="0">
                 <a:solidFill>
                   <a:srgbClr val="FFFFFF"/>
                 </a:solidFill>
                 <a:latin typeface="Calibri" pitchFamily="34" charset="0"/>
+                <a:ea typeface="Amiri" pitchFamily="2" charset="-78"/>
                 <a:cs typeface="Amiri" pitchFamily="2" charset="-78"/>
               </a:rPr>
               <a:t>سَأُجَرِّبُ</a:t>
@@ -5143,6 +5181,7 @@
                   <a:srgbClr val="D4AF37"/>
                 </a:solidFill>
                 <a:latin typeface="Amiri" pitchFamily="2" charset="-78"/>
+                <a:ea typeface="Amiri" pitchFamily="2" charset="-78"/>
                 <a:cs typeface="Amiri" pitchFamily="2" charset="-78"/>
               </a:rPr>
               <a:t>م</a:t>
@@ -5463,6 +5502,7 @@
                   <a:srgbClr val="8A6D1E"/>
                 </a:solidFill>
                 <a:latin typeface="Amiri" pitchFamily="2" charset="-78"/>
+                <a:ea typeface="Amiri" pitchFamily="2" charset="-78"/>
                 <a:cs typeface="Amiri" pitchFamily="2" charset="-78"/>
               </a:rPr>
               <a:t>اخْتَرْ عُنْوَانًا وَاحِدًا</a:t>
@@ -5743,6 +5783,7 @@
                   <a:srgbClr val="1B3B6F"/>
                 </a:solidFill>
                 <a:latin typeface="Amiri" pitchFamily="2" charset="-78"/>
+                <a:ea typeface="Amiri" pitchFamily="2" charset="-78"/>
                 <a:cs typeface="Amiri" pitchFamily="2" charset="-78"/>
               </a:rPr>
               <a:t>زِيَارَةٌ إِلَى مَطْعَمٍ</a:t>
@@ -5781,6 +5822,7 @@
                   <a:srgbClr val="1B3B6F"/>
                 </a:solidFill>
                 <a:latin typeface="Amiri" pitchFamily="2" charset="-78"/>
+                <a:ea typeface="Amiri" pitchFamily="2" charset="-78"/>
                 <a:cs typeface="Amiri" pitchFamily="2" charset="-78"/>
               </a:rPr>
               <a:t>(أ)</a:t>
@@ -5887,6 +5929,7 @@
                   <a:srgbClr val="1B3B6F"/>
                 </a:solidFill>
                 <a:latin typeface="Amiri" pitchFamily="2" charset="-78"/>
+                <a:ea typeface="Amiri" pitchFamily="2" charset="-78"/>
                 <a:cs typeface="Amiri" pitchFamily="2" charset="-78"/>
               </a:rPr>
               <a:t>أَيْنَ وَمَتَى وَمَعَ مَنْ؟ · مَاذَا طَلَبْتُمْ وَكَمْ دَفَعْتُمْ؟ · صِفْ مُشْكِلَةً أَوْ مُفَاجَأَةً · هَلْ تَنْصَحُ بِالمَطْعَمِ؟ وَهَلْ سَتَرْجِعُ؟</a:t>
@@ -6018,6 +6061,7 @@
                   <a:srgbClr val="1B3B6F"/>
                 </a:solidFill>
                 <a:latin typeface="Amiri" pitchFamily="2" charset="-78"/>
+                <a:ea typeface="Amiri" pitchFamily="2" charset="-78"/>
                 <a:cs typeface="Amiri" pitchFamily="2" charset="-78"/>
               </a:rPr>
               <a:t>الأَكْلُ فِي المَطْعَمِ أَمْ فِي البَيْتِ؟</a:t>
@@ -6056,6 +6100,7 @@
                   <a:srgbClr val="1B3B6F"/>
                 </a:solidFill>
                 <a:latin typeface="Amiri" pitchFamily="2" charset="-78"/>
+                <a:ea typeface="Amiri" pitchFamily="2" charset="-78"/>
                 <a:cs typeface="Amiri" pitchFamily="2" charset="-78"/>
               </a:rPr>
               <a:t>(ب)</a:t>
@@ -6162,6 +6207,7 @@
                   <a:srgbClr val="1B3B6F"/>
                 </a:solidFill>
                 <a:latin typeface="Amiri" pitchFamily="2" charset="-78"/>
+                <a:ea typeface="Amiri" pitchFamily="2" charset="-78"/>
                 <a:cs typeface="Amiri" pitchFamily="2" charset="-78"/>
               </a:rPr>
               <a:t>عَادَاتُ أُسْرَتِكَ · مَزَايَا المَطَاعِمِ وَعُيُوبُهَا · صِفْ تَجْرِبَةً حَدِيثَةً · مَا رَأْيُكَ؟ وَمَاذَا تَقْتَرِحُ؟</a:t>
@@ -6361,6 +6407,7 @@
                   <a:srgbClr val="D4AF37"/>
                 </a:solidFill>
                 <a:latin typeface="Amiri" pitchFamily="2" charset="-78"/>
+                <a:ea typeface="Amiri" pitchFamily="2" charset="-78"/>
                 <a:cs typeface="Amiri" pitchFamily="2" charset="-78"/>
               </a:rPr>
               <a:t>م</a:t>
@@ -6681,6 +6728,7 @@
                   <a:srgbClr val="8A6D1E"/>
                 </a:solidFill>
                 <a:latin typeface="Amiri" pitchFamily="2" charset="-78"/>
+                <a:ea typeface="Amiri" pitchFamily="2" charset="-78"/>
                 <a:cs typeface="Amiri" pitchFamily="2" charset="-78"/>
               </a:rPr>
               <a:t>خُطَّةُ الكِتَابَةِ</a:t>
@@ -7305,6 +7353,7 @@
                   <a:srgbClr val="1B3B6F"/>
                 </a:solidFill>
                 <a:latin typeface="Amiri" pitchFamily="2" charset="-78"/>
+                <a:ea typeface="Amiri" pitchFamily="2" charset="-78"/>
                 <a:cs typeface="Amiri" pitchFamily="2" charset="-78"/>
               </a:rPr>
               <a:t>طَلَبْتُ الكَبَابَ مَعَ الأُرْزِ.</a:t>
@@ -7404,6 +7453,7 @@
                   <a:srgbClr val="1B3B6F"/>
                 </a:solidFill>
                 <a:latin typeface="Amiri" pitchFamily="2" charset="-78"/>
+                <a:ea typeface="Amiri" pitchFamily="2" charset="-78"/>
                 <a:cs typeface="Amiri" pitchFamily="2" charset="-78"/>
               </a:rPr>
               <a:t>أَنْصَحُ بِهٰذَا المَطْعَمِ لِأَنَّ …</a:t>
@@ -7503,6 +7553,7 @@
                   <a:srgbClr val="1B3B6F"/>
                 </a:solidFill>
                 <a:latin typeface="Amiri" pitchFamily="2" charset="-78"/>
+                <a:ea typeface="Amiri" pitchFamily="2" charset="-78"/>
                 <a:cs typeface="Amiri" pitchFamily="2" charset="-78"/>
               </a:rPr>
               <a:t>سَنَرْجِعُ إِلَيْهِ فِي العِيدِ.</a:t>
@@ -7664,6 +7715,7 @@
                   <a:srgbClr val="1F2A37"/>
                 </a:solidFill>
                 <a:latin typeface="Amiri" pitchFamily="2" charset="-78"/>
+                <a:ea typeface="Amiri" pitchFamily="2" charset="-78"/>
                 <a:cs typeface="Amiri" pitchFamily="2" charset="-78"/>
               </a:rPr>
               <a:t>أ</a:t>
@@ -7690,6 +7742,7 @@
                   <a:srgbClr val="1F2A37"/>
                 </a:solidFill>
                 <a:latin typeface="Amiri" pitchFamily="2" charset="-78"/>
+                <a:ea typeface="Amiri" pitchFamily="2" charset="-78"/>
                 <a:cs typeface="Amiri" pitchFamily="2" charset="-78"/>
               </a:rPr>
               <a:t>ب</a:t>
@@ -7836,6 +7889,7 @@
                   <a:srgbClr val="D4AF37"/>
                 </a:solidFill>
                 <a:latin typeface="Amiri" pitchFamily="2" charset="-78"/>
+                <a:ea typeface="Amiri" pitchFamily="2" charset="-78"/>
                 <a:cs typeface="Amiri" pitchFamily="2" charset="-78"/>
               </a:rPr>
               <a:t>م</a:t>
@@ -8093,6 +8147,7 @@
                   <a:srgbClr val="8A6D1E"/>
                 </a:solidFill>
                 <a:latin typeface="Amiri" pitchFamily="2" charset="-78"/>
+                <a:ea typeface="Amiri" pitchFamily="2" charset="-78"/>
                 <a:cs typeface="Amiri" pitchFamily="2" charset="-78"/>
               </a:rPr>
               <a:t>أ</a:t>
@@ -8157,6 +8212,7 @@
                   <a:srgbClr val="1B3B6F"/>
                 </a:solidFill>
                 <a:latin typeface="Amiri" pitchFamily="2" charset="-78"/>
+                <a:ea typeface="Amiri" pitchFamily="2" charset="-78"/>
                 <a:cs typeface="Amiri" pitchFamily="2" charset="-78"/>
               </a:rPr>
               <a:t>أ</a:t>
@@ -8208,6 +8264,7 @@
                   <a:srgbClr val="8A6D1E"/>
                 </a:solidFill>
                 <a:latin typeface="Amiri" pitchFamily="2" charset="-78"/>
+                <a:ea typeface="Amiri" pitchFamily="2" charset="-78"/>
                 <a:cs typeface="Amiri" pitchFamily="2" charset="-78"/>
               </a:rPr>
               <a:t>نَمُوذَجُ الإِجَابَةِ</a:t>
@@ -8321,6 +8378,7 @@
                   <a:srgbClr val="1F2A37"/>
                 </a:solidFill>
                 <a:latin typeface="Amiri" pitchFamily="2" charset="-78"/>
+                <a:ea typeface="Amiri" pitchFamily="2" charset="-78"/>
                 <a:cs typeface="Amiri" pitchFamily="2" charset="-78"/>
               </a:rPr>
               <a:t>فِي الشَّهْرِ المَاضِي ذَهَبْتُ إِلَى مَطْعَمٍ تُرْكِيٍّ مَعَ أُسْرَتِي، بِمُنَاسَبَةِ عِيدِ مِيلَادِ أُمِّي. ذَهَبْنَا يَوْمَ الجُمُعَةِ فِي السَّاعَةِ السَّابِعَةِ مَسَاءً. كُنَّا سِتَّةَ أَشْخَاصٍ. المَطْعَمُ كَبِيرٌ وَجَمِيلٌ، وَهُوَ قَرِيبٌ مِنْ بَيْتِنَا.</a:t>
@@ -8340,6 +8398,7 @@
                   <a:srgbClr val="1F2A37"/>
                 </a:solidFill>
                 <a:latin typeface="Amiri" pitchFamily="2" charset="-78"/>
+                <a:ea typeface="Amiri" pitchFamily="2" charset="-78"/>
                 <a:cs typeface="Amiri" pitchFamily="2" charset="-78"/>
               </a:rPr>
               <a:t>طَلَبْتُ الكَبَابَ مَعَ الأُرْزِ وَالسَّلَطَةِ، وَطَلَبَتْ أُخْتِي البِيتْزَا. شَرِبْنَا عَصِيرَ البُرْتُقَالِ، وَشَرِبَتْ أُمِّي الشَّايَ. بَعْدَ ذٰلِكَ أَكَلْنَا البَقْلَاوَةَ، وَكَانَتْ حُلْوَةً جِدًّا. دَفَعْنَا سِتِّينَ جُنَيْهًا، وَهٰذَا غَالٍ قَلِيلًا.</a:t>
@@ -8359,6 +8418,7 @@
                   <a:srgbClr val="1F2A37"/>
                 </a:solidFill>
                 <a:latin typeface="Amiri" pitchFamily="2" charset="-78"/>
+                <a:ea typeface="Amiri" pitchFamily="2" charset="-78"/>
                 <a:cs typeface="Amiri" pitchFamily="2" charset="-78"/>
               </a:rPr>
               <a:t>كَانَ الطَّعَامُ لَذِيذًا جِدًّا، وَكَانَ النَّادِلُ لَطِيفًا. لٰكِنَّ الطَّعَامَ وَصَلَ مُتَأَخِّرًا، لِأَنَّ المَطْعَمَ كَانَ مُزْدَحِمًا، وَانْتَظَرْنَا نِصْفَ سَاعَةٍ. فِي النِّهَايَةِ أَحْضَرَ النَّادِلُ كَعْكَةً لِأُمِّي، فَفَرِحَتْ كَثِيرًا. كَانَتْ لَيْلَةً جَمِيلَةً وَمُمْتِعَةً.</a:t>
@@ -8378,6 +8438,7 @@
                   <a:srgbClr val="1F2A37"/>
                 </a:solidFill>
                 <a:latin typeface="Amiri" pitchFamily="2" charset="-78"/>
+                <a:ea typeface="Amiri" pitchFamily="2" charset="-78"/>
                 <a:cs typeface="Amiri" pitchFamily="2" charset="-78"/>
               </a:rPr>
               <a:t>أَنْصَحُ أَصْدِقَائِي بِهٰذَا المَطْعَمِ، لِأَنَّ الطَّعَامَ لَذِيذٌ وَالمَكَانَ جَمِيلٌ وَالأَسْعَارَ مَعْقُولَةٌ. سَنَرْجِعُ إِلَيْهِ فِي عِيدِ مِيلَادِ أَبِي، وَسَأَطْلُبُ طَبَقًا جَدِيدًا، مِثْلَ السَّمَكِ المَشْوِيِّ.</a:t>
@@ -8541,11 +8602,12 @@
               <a:buNone/>
             </a:pPr>
             <a:r>
-              <a:rPr lang="en-US" sz="950" b="1" dirty="0">
+              <a:rPr lang="ar-SA" sz="950" b="1" dirty="0">
                 <a:solidFill>
                   <a:srgbClr val="FFFFFF"/>
                 </a:solidFill>
                 <a:latin typeface="Calibri" pitchFamily="34" charset="0"/>
+                <a:ea typeface="Amiri" pitchFamily="2" charset="-78"/>
                 <a:cs typeface="Amiri" pitchFamily="2" charset="-78"/>
               </a:rPr>
               <a:t>ذَهَبْتُ</a:t>
@@ -8606,11 +8668,12 @@
               <a:buNone/>
             </a:pPr>
             <a:r>
-              <a:rPr lang="en-US" sz="950" b="1" dirty="0">
+              <a:rPr lang="ar-SA" sz="950" b="1" dirty="0">
                 <a:solidFill>
                   <a:srgbClr val="FFFFFF"/>
                 </a:solidFill>
                 <a:latin typeface="Calibri" pitchFamily="34" charset="0"/>
+                <a:ea typeface="Amiri" pitchFamily="2" charset="-78"/>
                 <a:cs typeface="Amiri" pitchFamily="2" charset="-78"/>
               </a:rPr>
               <a:t>دَفَعْنَا سِتِّينَ جُنَيْهًا</a:t>
@@ -8671,11 +8734,12 @@
               <a:buNone/>
             </a:pPr>
             <a:r>
-              <a:rPr lang="en-US" sz="950" b="1" dirty="0">
+              <a:rPr lang="ar-SA" sz="950" b="1" dirty="0">
                 <a:solidFill>
                   <a:srgbClr val="FFFFFF"/>
                 </a:solidFill>
                 <a:latin typeface="Calibri" pitchFamily="34" charset="0"/>
+                <a:ea typeface="Amiri" pitchFamily="2" charset="-78"/>
                 <a:cs typeface="Amiri" pitchFamily="2" charset="-78"/>
               </a:rPr>
               <a:t>لٰكِنَّ الطَّعَامَ وَصَلَ</a:t>
@@ -8736,11 +8800,12 @@
               <a:buNone/>
             </a:pPr>
             <a:r>
-              <a:rPr lang="en-US" sz="950" b="1" dirty="0">
+              <a:rPr lang="ar-SA" sz="950" b="1" dirty="0">
                 <a:solidFill>
                   <a:srgbClr val="FFFFFF"/>
                 </a:solidFill>
                 <a:latin typeface="Calibri" pitchFamily="34" charset="0"/>
+                <a:ea typeface="Amiri" pitchFamily="2" charset="-78"/>
                 <a:cs typeface="Amiri" pitchFamily="2" charset="-78"/>
               </a:rPr>
               <a:t>سَنَرْجِعُ</a:t>
@@ -8874,6 +8939,7 @@
                   <a:srgbClr val="D4AF37"/>
                 </a:solidFill>
                 <a:latin typeface="Amiri" pitchFamily="2" charset="-78"/>
+                <a:ea typeface="Amiri" pitchFamily="2" charset="-78"/>
                 <a:cs typeface="Amiri" pitchFamily="2" charset="-78"/>
               </a:rPr>
               <a:t>م</a:t>
@@ -9131,6 +9197,7 @@
                   <a:srgbClr val="8A6D1E"/>
                 </a:solidFill>
                 <a:latin typeface="Amiri" pitchFamily="2" charset="-78"/>
+                <a:ea typeface="Amiri" pitchFamily="2" charset="-78"/>
                 <a:cs typeface="Amiri" pitchFamily="2" charset="-78"/>
               </a:rPr>
               <a:t>أ</a:t>
@@ -9195,6 +9262,7 @@
                   <a:srgbClr val="1B3B6F"/>
                 </a:solidFill>
                 <a:latin typeface="Amiri" pitchFamily="2" charset="-78"/>
+                <a:ea typeface="Amiri" pitchFamily="2" charset="-78"/>
                 <a:cs typeface="Amiri" pitchFamily="2" charset="-78"/>
               </a:rPr>
               <a:t>أ</a:t>
@@ -9246,6 +9314,7 @@
                   <a:srgbClr val="8A6D1E"/>
                 </a:solidFill>
                 <a:latin typeface="Amiri" pitchFamily="2" charset="-78"/>
+                <a:ea typeface="Amiri" pitchFamily="2" charset="-78"/>
                 <a:cs typeface="Amiri" pitchFamily="2" charset="-78"/>
               </a:rPr>
               <a:t>نَمُوذَجُ الإِجَابَةِ</a:t>
@@ -9359,6 +9428,7 @@
                   <a:srgbClr val="1F2A37"/>
                 </a:solidFill>
                 <a:latin typeface="Amiri" pitchFamily="2" charset="-78"/>
+                <a:ea typeface="Amiri" pitchFamily="2" charset="-78"/>
                 <a:cs typeface="Amiri" pitchFamily="2" charset="-78"/>
               </a:rPr>
               <a:t>فِي الشَّهْرِ المَاضِي احْتَفَلْنَا بِعِيدِ مِيلَادِ أُمِّي فِي مَطْعَمٍ تُرْكِيٍّ يَقَعُ فِي وَسَطِ المَدِينَةِ. كَانَ أَبِي قَدْ حَجَزَ طَاوِلَةً لِسِتَّةِ أَشْخَاصٍ قَبْلَ أُسْبُوعٍ، لِأَنَّ المَطْعَمَ مَشْهُورٌ وَمُزْدَحِمٌ دَائِمًا فِي نِهَايَةِ الأُسْبُوعِ. ذَهَبْنَا بِالسَّيَّارَةِ فِي السَّابِعَةِ مَسَاءً.</a:t>
@@ -9378,6 +9448,7 @@
                   <a:srgbClr val="1F2A37"/>
                 </a:solidFill>
                 <a:latin typeface="Amiri" pitchFamily="2" charset="-78"/>
+                <a:ea typeface="Amiri" pitchFamily="2" charset="-78"/>
                 <a:cs typeface="Amiri" pitchFamily="2" charset="-78"/>
               </a:rPr>
               <a:t>بَدَأْنَا بِالمُقَبِّلَاتِ، ثُمَّ طَلَبْتُ طَبَقَ الكَبَابِ المَشْوِيِّ مَعَ الأُرْزِ، أَمَّا أُخْتِي فَاخْتَارَتْ طَبَقًا نَبَاتِيًّا، وَشَرِبْنَا عَصِيرَ الرُّمَّانِ الطَّازَجَ، وَخَتَمْنَا الوَجْبَةَ بِالبَقْلَاوَةِ وَالشَّايِ التُّرْكِيِّ اللَّذِيذِ. دَفَعْنَا تِسْعِينَ جُنَيْهًا، وَهُوَ سِعْرٌ مُرْتَفِعٌ قَلِيلًا، لٰكِنَّهُ مَعْقُولٌ لِأَنَّ الطَّعَامَ كَانَ طَازَجًا.</a:t>
@@ -9397,6 +9468,7 @@
                   <a:srgbClr val="1F2A37"/>
                 </a:solidFill>
                 <a:latin typeface="Amiri" pitchFamily="2" charset="-78"/>
+                <a:ea typeface="Amiri" pitchFamily="2" charset="-78"/>
                 <a:cs typeface="Amiri" pitchFamily="2" charset="-78"/>
               </a:rPr>
               <a:t>حَدَثَتْ مُشْكِلَةٌ صَغِيرَةٌ؛ فَقَدْ أَحْضَرَ النَّادِلُ لِأُخْتِي طَبَقًا بِاللَّحْمِ، فَشَرَحْنَا لَهُ بِأَدَبٍ، فَاعْتَذَرَ وَغَيَّرَهُ بِسُرْعَةٍ، ثُمَّ قَدَّمَ لِأُمِّي كَعْكَةً صَغِيرَةً هَدِيَّةً مِنَ المَطْعَمِ، فَضَحِكْنَا جَمِيعًا وَشَكَرْنَاهُ. كَانَتْ مُفَاجَأَةً جَمِيلَةً.</a:t>
@@ -9416,6 +9488,7 @@
                   <a:srgbClr val="1F2A37"/>
                 </a:solidFill>
                 <a:latin typeface="Amiri" pitchFamily="2" charset="-78"/>
+                <a:ea typeface="Amiri" pitchFamily="2" charset="-78"/>
                 <a:cs typeface="Amiri" pitchFamily="2" charset="-78"/>
               </a:rPr>
               <a:t>فِي رَأْيِي، تُهِمُّ الخِدْمَةُ الجَيِّدَةُ بِقَدْرِ مَا يُهِمُّ الطَّعَامُ اللَّذِيذُ، لِأَنَّ الزَّبُونَ يَتَذَكَّرُ المُعَامَلَةَ الطَّيِّبَةَ طَوِيلًا، لِذٰلِكَ أَنْصَحُ بِهٰذَا المَطْعَمِ بِالتَّأْكِيدِ. وَلَوْ كَانَتِ الأَسْعَارُ أَرْخَصَ قَلِيلًا، لَزُرْنَاهُ كُلَّ شَهْرٍ.</a:t>
@@ -9514,11 +9587,12 @@
               <a:buNone/>
             </a:pPr>
             <a:r>
-              <a:rPr lang="en-US" sz="950" b="1" dirty="0">
+              <a:rPr lang="ar-SA" sz="950" b="1" dirty="0">
                 <a:solidFill>
                   <a:srgbClr val="FFFFFF"/>
                 </a:solidFill>
                 <a:latin typeface="Calibri" pitchFamily="34" charset="0"/>
+                <a:ea typeface="Amiri" pitchFamily="2" charset="-78"/>
                 <a:cs typeface="Amiri" pitchFamily="2" charset="-78"/>
               </a:rPr>
               <a:t>كَانَ أَبِي قَدْ حَجَزَ</a:t>
@@ -9579,11 +9653,12 @@
               <a:buNone/>
             </a:pPr>
             <a:r>
-              <a:rPr lang="en-US" sz="950" b="1" dirty="0">
+              <a:rPr lang="ar-SA" sz="950" b="1" dirty="0">
                 <a:solidFill>
                   <a:srgbClr val="FFFFFF"/>
                 </a:solidFill>
                 <a:latin typeface="Calibri" pitchFamily="34" charset="0"/>
+                <a:ea typeface="Amiri" pitchFamily="2" charset="-78"/>
                 <a:cs typeface="Amiri" pitchFamily="2" charset="-78"/>
               </a:rPr>
               <a:t>أَمَّا أُخْتِي فَاخْتَارَتْ</a:t>
@@ -9644,11 +9719,12 @@
               <a:buNone/>
             </a:pPr>
             <a:r>
-              <a:rPr lang="en-US" sz="950" b="1" dirty="0">
+              <a:rPr lang="ar-SA" sz="950" b="1" dirty="0">
                 <a:solidFill>
                   <a:srgbClr val="FFFFFF"/>
                 </a:solidFill>
                 <a:latin typeface="Calibri" pitchFamily="34" charset="0"/>
+                <a:ea typeface="Amiri" pitchFamily="2" charset="-78"/>
                 <a:cs typeface="Amiri" pitchFamily="2" charset="-78"/>
               </a:rPr>
               <a:t>فَاعْتَذَرَ وَغَيَّرَهُ</a:t>
@@ -9709,11 +9785,12 @@
               <a:buNone/>
             </a:pPr>
             <a:r>
-              <a:rPr lang="en-US" sz="950" b="1" dirty="0">
+              <a:rPr lang="ar-SA" sz="950" b="1" dirty="0">
                 <a:solidFill>
                   <a:srgbClr val="FFFFFF"/>
                 </a:solidFill>
                 <a:latin typeface="Calibri" pitchFamily="34" charset="0"/>
+                <a:ea typeface="Amiri" pitchFamily="2" charset="-78"/>
                 <a:cs typeface="Amiri" pitchFamily="2" charset="-78"/>
               </a:rPr>
               <a:t>لَوْ كَانَتِ … لَزُرْنَاهُ</a:t>
@@ -9847,6 +9924,7 @@
                   <a:srgbClr val="D4AF37"/>
                 </a:solidFill>
                 <a:latin typeface="Amiri" pitchFamily="2" charset="-78"/>
+                <a:ea typeface="Amiri" pitchFamily="2" charset="-78"/>
                 <a:cs typeface="Amiri" pitchFamily="2" charset="-78"/>
               </a:rPr>
               <a:t>م</a:t>
@@ -10104,6 +10182,7 @@
                   <a:srgbClr val="8A6D1E"/>
                 </a:solidFill>
                 <a:latin typeface="Amiri" pitchFamily="2" charset="-78"/>
+                <a:ea typeface="Amiri" pitchFamily="2" charset="-78"/>
                 <a:cs typeface="Amiri" pitchFamily="2" charset="-78"/>
               </a:rPr>
               <a:t>ب</a:t>
@@ -10168,6 +10247,7 @@
                   <a:srgbClr val="1B3B6F"/>
                 </a:solidFill>
                 <a:latin typeface="Amiri" pitchFamily="2" charset="-78"/>
+                <a:ea typeface="Amiri" pitchFamily="2" charset="-78"/>
                 <a:cs typeface="Amiri" pitchFamily="2" charset="-78"/>
               </a:rPr>
               <a:t>ب</a:t>
@@ -10219,6 +10299,7 @@
                   <a:srgbClr val="8A6D1E"/>
                 </a:solidFill>
                 <a:latin typeface="Amiri" pitchFamily="2" charset="-78"/>
+                <a:ea typeface="Amiri" pitchFamily="2" charset="-78"/>
                 <a:cs typeface="Amiri" pitchFamily="2" charset="-78"/>
               </a:rPr>
               <a:t>نَمُوذَجُ الإِجَابَةِ</a:t>
@@ -10332,6 +10413,7 @@
                   <a:srgbClr val="1F2A37"/>
                 </a:solidFill>
                 <a:latin typeface="Amiri" pitchFamily="2" charset="-78"/>
+                <a:ea typeface="Amiri" pitchFamily="2" charset="-78"/>
                 <a:cs typeface="Amiri" pitchFamily="2" charset="-78"/>
               </a:rPr>
               <a:t>يَخْتَلِفُ النَّاسُ فِي آرَائِهِمْ: هَلِ الأَكْلُ فِي المَطَاعِمِ أَفْضَلُ أَمِ الأَكْلُ فِي البَيْتِ؟ فِي أُسْرَتِي نَأْكُلُ فِي البَيْتِ عَادَةً، وَنَذْهَبُ إِلَى المَطْعَمِ مَرَّةً أَوْ مَرَّتَيْنِ فِي الشَّهْرِ فَقَطْ، لِأَنَّ أُمِّي تُحِبُّ الطَّبْخَ.</a:t>
@@ -10351,6 +10433,7 @@
                   <a:srgbClr val="1F2A37"/>
                 </a:solidFill>
                 <a:latin typeface="Amiri" pitchFamily="2" charset="-78"/>
+                <a:ea typeface="Amiri" pitchFamily="2" charset="-78"/>
                 <a:cs typeface="Amiri" pitchFamily="2" charset="-78"/>
               </a:rPr>
               <a:t>لِلْمَطَاعِمِ مَزَايَا كَثِيرَةٌ؛ فَهِيَ تُرِيحُنَا مِنَ الطَّبْخِ، وَتُتِيحُ لَنَا تَجْرِبَةَ أَطْبَاقٍ مِنْ ثَقَافَاتٍ مُخْتَلِفَةٍ. غَيْرَ أَنَّهَا غَالِيَةٌ، وَلَا نَعْرِفُ دَائِمًا كَمْ مِنَ الزَّيْتِ وَالمِلْحِ فِي الطَّعَامِ. أَمَّا الأَكْلُ فِي البَيْتِ فَأَرْخَصُ وَأَصَحُّ، وَيَجْمَعُ الأُسْرَةَ حَوْلَ المَائِدَةِ.</a:t>
@@ -10370,6 +10453,7 @@
                   <a:srgbClr val="1F2A37"/>
                 </a:solidFill>
                 <a:latin typeface="Amiri" pitchFamily="2" charset="-78"/>
+                <a:ea typeface="Amiri" pitchFamily="2" charset="-78"/>
                 <a:cs typeface="Amiri" pitchFamily="2" charset="-78"/>
               </a:rPr>
               <a:t>فِي العُطْلَةِ المَاضِيَةِ قَرَّرْنَا أَنْ نَطْبُخَ وَجْبَةً لُبْنَانِيَّةً فِي البَيْتِ بَدَلًا مِنَ المَطْعَمِ؛ حَضَّرْنَا الحُمُّصَ وَالتَّبُّولَةَ وَالدَّجَاجَ المَشْوِيَّ مَعًا، فَكَانَتِ الوَجْبَةُ لَذِيذَةً، وَكَلَّفَتْنَا نِصْفَ سِعْرِ المَطْعَمِ، وَشَعَرْنَا بِالفَخْرِ لِأَنَّنَا طَبَخْنَا بِأَنْفُسِنَا.</a:t>
@@ -10389,6 +10473,7 @@
                   <a:srgbClr val="1F2A37"/>
                 </a:solidFill>
                 <a:latin typeface="Amiri" pitchFamily="2" charset="-78"/>
+                <a:ea typeface="Amiri" pitchFamily="2" charset="-78"/>
                 <a:cs typeface="Amiri" pitchFamily="2" charset="-78"/>
               </a:rPr>
               <a:t>لِذٰلِكَ أَرَى أَنَّ الحَلَّ هُوَ التَّوَازُنُ: نَأْكُلُ فِي البَيْتِ أَغْلَبَ الأَيَّامِ، وَنَذْهَبُ إِلَى المَطْعَمِ فِي المُنَاسَبَاتِ. وَلَوْ تَعَلَّمَ الشَّبَابُ الطَّبْخَ، لَوَفَّرُوا مَالًا كَثِيرًا وَعَاشُوا حَيَاةً أَصَحَّ. وَأَنْتُمْ، أَيْنَ تُفَضِّلُونَ أَنْ تَأْكُلُوا؟</a:t>
@@ -10487,11 +10572,12 @@
               <a:buNone/>
             </a:pPr>
             <a:r>
-              <a:rPr lang="en-US" sz="950" b="1" dirty="0">
+              <a:rPr lang="ar-SA" sz="950" b="1" dirty="0">
                 <a:solidFill>
                   <a:srgbClr val="FFFFFF"/>
                 </a:solidFill>
                 <a:latin typeface="Calibri" pitchFamily="34" charset="0"/>
+                <a:ea typeface="Amiri" pitchFamily="2" charset="-78"/>
                 <a:cs typeface="Amiri" pitchFamily="2" charset="-78"/>
               </a:rPr>
               <a:t>غَيْرَ أَنَّهَا غَالِيَةٌ</a:t>
@@ -10552,11 +10638,12 @@
               <a:buNone/>
             </a:pPr>
             <a:r>
-              <a:rPr lang="en-US" sz="950" b="1" dirty="0">
+              <a:rPr lang="ar-SA" sz="950" b="1" dirty="0">
                 <a:solidFill>
                   <a:srgbClr val="FFFFFF"/>
                 </a:solidFill>
                 <a:latin typeface="Calibri" pitchFamily="34" charset="0"/>
+                <a:ea typeface="Amiri" pitchFamily="2" charset="-78"/>
                 <a:cs typeface="Amiri" pitchFamily="2" charset="-78"/>
               </a:rPr>
               <a:t>أَمَّا الأَكْلُ فِي البَيْتِ فَأَرْخَصُ</a:t>
@@ -10617,11 +10704,12 @@
               <a:buNone/>
             </a:pPr>
             <a:r>
-              <a:rPr lang="en-US" sz="950" b="1" dirty="0">
+              <a:rPr lang="ar-SA" sz="950" b="1" dirty="0">
                 <a:solidFill>
                   <a:srgbClr val="FFFFFF"/>
                 </a:solidFill>
                 <a:latin typeface="Calibri" pitchFamily="34" charset="0"/>
+                <a:ea typeface="Amiri" pitchFamily="2" charset="-78"/>
                 <a:cs typeface="Amiri" pitchFamily="2" charset="-78"/>
               </a:rPr>
               <a:t>قَرَّرْنَا أَنْ نَطْبُخَ</a:t>
@@ -10682,11 +10770,12 @@
               <a:buNone/>
             </a:pPr>
             <a:r>
-              <a:rPr lang="en-US" sz="950" b="1" dirty="0">
+              <a:rPr lang="ar-SA" sz="950" b="1" dirty="0">
                 <a:solidFill>
                   <a:srgbClr val="FFFFFF"/>
                 </a:solidFill>
                 <a:latin typeface="Calibri" pitchFamily="34" charset="0"/>
+                <a:ea typeface="Amiri" pitchFamily="2" charset="-78"/>
                 <a:cs typeface="Amiri" pitchFamily="2" charset="-78"/>
               </a:rPr>
               <a:t>لَوْ … لَوَفَّرُوا</a:t>
@@ -10820,6 +10909,7 @@
                   <a:srgbClr val="D4AF37"/>
                 </a:solidFill>
                 <a:latin typeface="Amiri" pitchFamily="2" charset="-78"/>
+                <a:ea typeface="Amiri" pitchFamily="2" charset="-78"/>
                 <a:cs typeface="Amiri" pitchFamily="2" charset="-78"/>
               </a:rPr>
               <a:t>م</a:t>
@@ -11140,6 +11230,7 @@
                   <a:srgbClr val="8A6D1E"/>
                 </a:solidFill>
                 <a:latin typeface="Amiri" pitchFamily="2" charset="-78"/>
+                <a:ea typeface="Amiri" pitchFamily="2" charset="-78"/>
                 <a:cs typeface="Amiri" pitchFamily="2" charset="-78"/>
               </a:rPr>
               <a:t>قَيِّمْ عَمَلَكَ</a:t>
@@ -12384,6 +12475,7 @@
                   <a:srgbClr val="FFFFFF"/>
                 </a:solidFill>
                 <a:latin typeface="Amiri" pitchFamily="2" charset="-78"/>
+                <a:ea typeface="Amiri" pitchFamily="2" charset="-78"/>
                 <a:cs typeface="Amiri" pitchFamily="2" charset="-78"/>
               </a:rPr>
               <a:t>أَحْسَنْتُمْ! إِلَى اللِّقَاءِ</a:t>
@@ -12536,6 +12628,7 @@
                   <a:srgbClr val="D4AF37"/>
                 </a:solidFill>
                 <a:latin typeface="Amiri" pitchFamily="2" charset="-78"/>
+                <a:ea typeface="Amiri" pitchFamily="2" charset="-78"/>
                 <a:cs typeface="Amiri" pitchFamily="2" charset="-78"/>
               </a:rPr>
               <a:t>وَرْشَةُ التَّدْرِيبِ</a:t>
@@ -12669,6 +12762,7 @@
                   <a:srgbClr val="D4AF37"/>
                 </a:solidFill>
                 <a:latin typeface="Amiri" pitchFamily="2" charset="-78"/>
+                <a:ea typeface="Amiri" pitchFamily="2" charset="-78"/>
                 <a:cs typeface="Amiri" pitchFamily="2" charset="-78"/>
               </a:rPr>
               <a:t>م</a:t>
@@ -12989,6 +13083,7 @@
                   <a:srgbClr val="8A6D1E"/>
                 </a:solidFill>
                 <a:latin typeface="Amiri" pitchFamily="2" charset="-78"/>
+                <a:ea typeface="Amiri" pitchFamily="2" charset="-78"/>
                 <a:cs typeface="Amiri" pitchFamily="2" charset="-78"/>
               </a:rPr>
               <a:t>آدَابُ الصَّفِّ</a:t>
@@ -14520,6 +14615,7 @@
                   <a:srgbClr val="D4AF37"/>
                 </a:solidFill>
                 <a:latin typeface="Amiri" pitchFamily="2" charset="-78"/>
+                <a:ea typeface="Amiri" pitchFamily="2" charset="-78"/>
                 <a:cs typeface="Amiri" pitchFamily="2" charset="-78"/>
               </a:rPr>
               <a:t>م</a:t>
@@ -14840,6 +14936,7 @@
                   <a:srgbClr val="8A6D1E"/>
                 </a:solidFill>
                 <a:latin typeface="Amiri" pitchFamily="2" charset="-78"/>
+                <a:ea typeface="Amiri" pitchFamily="2" charset="-78"/>
                 <a:cs typeface="Amiri" pitchFamily="2" charset="-78"/>
               </a:rPr>
               <a:t>خَرِيطَةُ الوَرْشَةِ</a:t>
@@ -15154,6 +15251,7 @@
                   <a:srgbClr val="1B3B6F"/>
                 </a:solidFill>
                 <a:latin typeface="Amiri" pitchFamily="2" charset="-78"/>
+                <a:ea typeface="Amiri" pitchFamily="2" charset="-78"/>
                 <a:cs typeface="Amiri" pitchFamily="2" charset="-78"/>
               </a:rPr>
               <a:t>كَيْفَ</a:t>
@@ -15430,6 +15528,7 @@
                   <a:srgbClr val="1E6B52"/>
                 </a:solidFill>
                 <a:latin typeface="Amiri" pitchFamily="2" charset="-78"/>
+                <a:ea typeface="Amiri" pitchFamily="2" charset="-78"/>
                 <a:cs typeface="Amiri" pitchFamily="2" charset="-78"/>
               </a:rPr>
               <a:t>الاسْتِمَارَةُ</a:t>
@@ -15706,6 +15805,7 @@
                   <a:srgbClr val="1E6B52"/>
                 </a:solidFill>
                 <a:latin typeface="Amiri" pitchFamily="2" charset="-78"/>
+                <a:ea typeface="Amiri" pitchFamily="2" charset="-78"/>
                 <a:cs typeface="Amiri" pitchFamily="2" charset="-78"/>
               </a:rPr>
               <a:t>الرِّسَالَةُ</a:t>
@@ -15982,6 +16082,7 @@
                   <a:srgbClr val="1E6B52"/>
                 </a:solidFill>
                 <a:latin typeface="Amiri" pitchFamily="2" charset="-78"/>
+                <a:ea typeface="Amiri" pitchFamily="2" charset="-78"/>
                 <a:cs typeface="Amiri" pitchFamily="2" charset="-78"/>
               </a:rPr>
               <a:t>المَقَالُ</a:t>
@@ -16258,6 +16359,7 @@
                   <a:srgbClr val="8A6D1E"/>
                 </a:solidFill>
                 <a:latin typeface="Amiri" pitchFamily="2" charset="-78"/>
+                <a:ea typeface="Amiri" pitchFamily="2" charset="-78"/>
                 <a:cs typeface="Amiri" pitchFamily="2" charset="-78"/>
               </a:rPr>
               <a:t>قَيِّمْ</a:t>
@@ -16501,6 +16603,7 @@
                   <a:srgbClr val="D4AF37"/>
                 </a:solidFill>
                 <a:latin typeface="Amiri" pitchFamily="2" charset="-78"/>
+                <a:ea typeface="Amiri" pitchFamily="2" charset="-78"/>
                 <a:cs typeface="Amiri" pitchFamily="2" charset="-78"/>
               </a:rPr>
               <a:t>م</a:t>
@@ -16821,6 +16924,7 @@
                   <a:srgbClr val="8A6D1E"/>
                 </a:solidFill>
                 <a:latin typeface="Amiri" pitchFamily="2" charset="-78"/>
+                <a:ea typeface="Amiri" pitchFamily="2" charset="-78"/>
                 <a:cs typeface="Amiri" pitchFamily="2" charset="-78"/>
               </a:rPr>
               <a:t>امْتِحَانُ الكِتَابَةِ</a:t>
@@ -17445,6 +17549,7 @@
                   <a:srgbClr val="1B3B6F"/>
                 </a:solidFill>
                 <a:latin typeface="Amiri" pitchFamily="2" charset="-78"/>
+                <a:ea typeface="Amiri" pitchFamily="2" charset="-78"/>
                 <a:cs typeface="Amiri" pitchFamily="2" charset="-78"/>
               </a:rPr>
               <a:t>كَمْ ثَمَنُ …؟ · دَفَعْنَا خَمْسِينَ جُنَيْهًا</a:t>
@@ -17544,6 +17649,7 @@
                   <a:srgbClr val="1B3B6F"/>
                 </a:solidFill>
                 <a:latin typeface="Amiri" pitchFamily="2" charset="-78"/>
+                <a:ea typeface="Amiri" pitchFamily="2" charset="-78"/>
                 <a:cs typeface="Amiri" pitchFamily="2" charset="-78"/>
               </a:rPr>
               <a:t>أَرْجُو أَنْ … · أَنْصَحُ بِهٰذَا المَطْعَمِ</a:t>
@@ -17643,6 +17749,7 @@
                   <a:srgbClr val="1B3B6F"/>
                 </a:solidFill>
                 <a:latin typeface="Amiri" pitchFamily="2" charset="-78"/>
+                <a:ea typeface="Amiri" pitchFamily="2" charset="-78"/>
                 <a:cs typeface="Amiri" pitchFamily="2" charset="-78"/>
               </a:rPr>
               <a:t>أَرْخَصُ · أَصَحُّ · أَهَمُّ مِنْ</a:t>
@@ -17814,6 +17921,7 @@
                   <a:srgbClr val="D4AF37"/>
                 </a:solidFill>
                 <a:latin typeface="Amiri" pitchFamily="2" charset="-78"/>
+                <a:ea typeface="Amiri" pitchFamily="2" charset="-78"/>
                 <a:cs typeface="Amiri" pitchFamily="2" charset="-78"/>
               </a:rPr>
               <a:t>م</a:t>
@@ -18134,6 +18242,7 @@
                   <a:srgbClr val="8A6D1E"/>
                 </a:solidFill>
                 <a:latin typeface="Amiri" pitchFamily="2" charset="-78"/>
+                <a:ea typeface="Amiri" pitchFamily="2" charset="-78"/>
                 <a:cs typeface="Amiri" pitchFamily="2" charset="-78"/>
               </a:rPr>
               <a:t>اسْتِمَارَةُ رَأْيِ الزَّبَائِنِ</a:t>
@@ -18490,6 +18599,7 @@
                   <a:srgbClr val="1B3B6F"/>
                 </a:solidFill>
                 <a:latin typeface="Amiri" pitchFamily="2" charset="-78"/>
+                <a:ea typeface="Amiri" pitchFamily="2" charset="-78"/>
                 <a:cs typeface="Amiri" pitchFamily="2" charset="-78"/>
               </a:rPr>
               <a:t>الاسْمُ</a:t>
@@ -18734,6 +18844,7 @@
                   <a:srgbClr val="1B3B6F"/>
                 </a:solidFill>
                 <a:latin typeface="Amiri" pitchFamily="2" charset="-78"/>
+                <a:ea typeface="Amiri" pitchFamily="2" charset="-78"/>
                 <a:cs typeface="Amiri" pitchFamily="2" charset="-78"/>
               </a:rPr>
               <a:t>تَارِيخُ الزِّيَارَةِ</a:t>
@@ -18978,6 +19089,7 @@
                   <a:srgbClr val="1B3B6F"/>
                 </a:solidFill>
                 <a:latin typeface="Amiri" pitchFamily="2" charset="-78"/>
+                <a:ea typeface="Amiri" pitchFamily="2" charset="-78"/>
                 <a:cs typeface="Amiri" pitchFamily="2" charset="-78"/>
               </a:rPr>
               <a:t>عَدَدُ الأَشْخَاصِ</a:t>
@@ -19222,6 +19334,7 @@
                   <a:srgbClr val="1B3B6F"/>
                 </a:solidFill>
                 <a:latin typeface="Amiri" pitchFamily="2" charset="-78"/>
+                <a:ea typeface="Amiri" pitchFamily="2" charset="-78"/>
                 <a:cs typeface="Amiri" pitchFamily="2" charset="-78"/>
               </a:rPr>
               <a:t>مَاذَا طَلَبْتَ؟</a:t>
@@ -19466,6 +19579,7 @@
                   <a:srgbClr val="1B3B6F"/>
                 </a:solidFill>
                 <a:latin typeface="Amiri" pitchFamily="2" charset="-78"/>
+                <a:ea typeface="Amiri" pitchFamily="2" charset="-78"/>
                 <a:cs typeface="Amiri" pitchFamily="2" charset="-78"/>
               </a:rPr>
               <a:t>مَاذَا شَرِبْتَ؟</a:t>
@@ -19710,6 +19824,7 @@
                   <a:srgbClr val="1B3B6F"/>
                 </a:solidFill>
                 <a:latin typeface="Amiri" pitchFamily="2" charset="-78"/>
+                <a:ea typeface="Amiri" pitchFamily="2" charset="-78"/>
                 <a:cs typeface="Amiri" pitchFamily="2" charset="-78"/>
               </a:rPr>
               <a:t>كَمْ دَفَعْتَ؟</a:t>
@@ -19954,6 +20069,7 @@
                   <a:srgbClr val="1B3B6F"/>
                 </a:solidFill>
                 <a:latin typeface="Amiri" pitchFamily="2" charset="-78"/>
+                <a:ea typeface="Amiri" pitchFamily="2" charset="-78"/>
                 <a:cs typeface="Amiri" pitchFamily="2" charset="-78"/>
               </a:rPr>
               <a:t>رَأْيُكَ فِي الخِدْمَةِ (كَلِمَةٌ)</a:t>
@@ -20133,6 +20249,7 @@
                   <a:srgbClr val="1B3B6F"/>
                 </a:solidFill>
                 <a:latin typeface="Amiri" pitchFamily="2" charset="-78"/>
+                <a:ea typeface="Amiri" pitchFamily="2" charset="-78"/>
                 <a:cs typeface="Amiri" pitchFamily="2" charset="-78"/>
               </a:rPr>
               <a:t>جُمْلَةٌ: هَلْ سَتَرْجِعُ؟ وَلِمَاذَا؟</a:t>
@@ -20342,6 +20459,7 @@
                   <a:srgbClr val="D4AF37"/>
                 </a:solidFill>
                 <a:latin typeface="Amiri" pitchFamily="2" charset="-78"/>
+                <a:ea typeface="Amiri" pitchFamily="2" charset="-78"/>
                 <a:cs typeface="Amiri" pitchFamily="2" charset="-78"/>
               </a:rPr>
               <a:t>م</a:t>
@@ -20662,6 +20780,7 @@
                   <a:srgbClr val="8A6D1E"/>
                 </a:solidFill>
                 <a:latin typeface="Amiri" pitchFamily="2" charset="-78"/>
+                <a:ea typeface="Amiri" pitchFamily="2" charset="-78"/>
                 <a:cs typeface="Amiri" pitchFamily="2" charset="-78"/>
               </a:rPr>
               <a:t>نَمُوذَجُ الإِجَابَةِ</a:t>
@@ -20980,6 +21099,7 @@
                   <a:srgbClr val="1B3B6F"/>
                 </a:solidFill>
                 <a:latin typeface="Amiri" pitchFamily="2" charset="-78"/>
+                <a:ea typeface="Amiri" pitchFamily="2" charset="-78"/>
                 <a:cs typeface="Amiri" pitchFamily="2" charset="-78"/>
               </a:rPr>
               <a:t>سَارَةُ عَلِيٌّ</a:t>
@@ -21018,6 +21138,7 @@
                   <a:srgbClr val="1B3B6F"/>
                 </a:solidFill>
                 <a:latin typeface="Amiri" pitchFamily="2" charset="-78"/>
+                <a:ea typeface="Amiri" pitchFamily="2" charset="-78"/>
                 <a:cs typeface="Amiri" pitchFamily="2" charset="-78"/>
               </a:rPr>
               <a:t>الاسْمُ</a:t>
@@ -21159,6 +21280,7 @@
                   <a:srgbClr val="1B3B6F"/>
                 </a:solidFill>
                 <a:latin typeface="Amiri" pitchFamily="2" charset="-78"/>
+                <a:ea typeface="Amiri" pitchFamily="2" charset="-78"/>
                 <a:cs typeface="Amiri" pitchFamily="2" charset="-78"/>
               </a:rPr>
               <a:t>الخَامِسُ مِنْ مَايُو</a:t>
@@ -21197,6 +21319,7 @@
                   <a:srgbClr val="1B3B6F"/>
                 </a:solidFill>
                 <a:latin typeface="Amiri" pitchFamily="2" charset="-78"/>
+                <a:ea typeface="Amiri" pitchFamily="2" charset="-78"/>
                 <a:cs typeface="Amiri" pitchFamily="2" charset="-78"/>
               </a:rPr>
               <a:t>تَارِيخُ الزِّيَارَةِ</a:t>
@@ -21338,6 +21461,7 @@
                   <a:srgbClr val="1B3B6F"/>
                 </a:solidFill>
                 <a:latin typeface="Amiri" pitchFamily="2" charset="-78"/>
+                <a:ea typeface="Amiri" pitchFamily="2" charset="-78"/>
                 <a:cs typeface="Amiri" pitchFamily="2" charset="-78"/>
               </a:rPr>
               <a:t>أَرْبَعَةُ أَشْخَاصٍ</a:t>
@@ -21376,6 +21500,7 @@
                   <a:srgbClr val="1B3B6F"/>
                 </a:solidFill>
                 <a:latin typeface="Amiri" pitchFamily="2" charset="-78"/>
+                <a:ea typeface="Amiri" pitchFamily="2" charset="-78"/>
                 <a:cs typeface="Amiri" pitchFamily="2" charset="-78"/>
               </a:rPr>
               <a:t>عَدَدُ الأَشْخَاصِ</a:t>
@@ -21517,6 +21642,7 @@
                   <a:srgbClr val="1B3B6F"/>
                 </a:solidFill>
                 <a:latin typeface="Amiri" pitchFamily="2" charset="-78"/>
+                <a:ea typeface="Amiri" pitchFamily="2" charset="-78"/>
                 <a:cs typeface="Amiri" pitchFamily="2" charset="-78"/>
               </a:rPr>
               <a:t>دَجَاجٌ مَشْوِيٌّ مَعَ الأُرْزِ</a:t>
@@ -21555,6 +21681,7 @@
                   <a:srgbClr val="1B3B6F"/>
                 </a:solidFill>
                 <a:latin typeface="Amiri" pitchFamily="2" charset="-78"/>
+                <a:ea typeface="Amiri" pitchFamily="2" charset="-78"/>
                 <a:cs typeface="Amiri" pitchFamily="2" charset="-78"/>
               </a:rPr>
               <a:t>مَاذَا طَلَبْتَ؟</a:t>
@@ -21696,6 +21823,7 @@
                   <a:srgbClr val="1B3B6F"/>
                 </a:solidFill>
                 <a:latin typeface="Amiri" pitchFamily="2" charset="-78"/>
+                <a:ea typeface="Amiri" pitchFamily="2" charset="-78"/>
                 <a:cs typeface="Amiri" pitchFamily="2" charset="-78"/>
               </a:rPr>
               <a:t>عَصِيرُ لَيْمُونٍ</a:t>
@@ -21734,6 +21862,7 @@
                   <a:srgbClr val="1B3B6F"/>
                 </a:solidFill>
                 <a:latin typeface="Amiri" pitchFamily="2" charset="-78"/>
+                <a:ea typeface="Amiri" pitchFamily="2" charset="-78"/>
                 <a:cs typeface="Amiri" pitchFamily="2" charset="-78"/>
               </a:rPr>
               <a:t>مَاذَا شَرِبْتَ؟</a:t>
@@ -21875,6 +22004,7 @@
                   <a:srgbClr val="1B3B6F"/>
                 </a:solidFill>
                 <a:latin typeface="Amiri" pitchFamily="2" charset="-78"/>
+                <a:ea typeface="Amiri" pitchFamily="2" charset="-78"/>
                 <a:cs typeface="Amiri" pitchFamily="2" charset="-78"/>
               </a:rPr>
               <a:t>ثَلَاثُونَ جُنَيْهًا</a:t>
@@ -21913,6 +22043,7 @@
                   <a:srgbClr val="1B3B6F"/>
                 </a:solidFill>
                 <a:latin typeface="Amiri" pitchFamily="2" charset="-78"/>
+                <a:ea typeface="Amiri" pitchFamily="2" charset="-78"/>
                 <a:cs typeface="Amiri" pitchFamily="2" charset="-78"/>
               </a:rPr>
               <a:t>كَمْ دَفَعْتَ؟</a:t>
@@ -22054,6 +22185,7 @@
                   <a:srgbClr val="1B3B6F"/>
                 </a:solidFill>
                 <a:latin typeface="Amiri" pitchFamily="2" charset="-78"/>
+                <a:ea typeface="Amiri" pitchFamily="2" charset="-78"/>
                 <a:cs typeface="Amiri" pitchFamily="2" charset="-78"/>
               </a:rPr>
               <a:t>مُمْتَازَةٌ</a:t>
@@ -22092,6 +22224,7 @@
                   <a:srgbClr val="1B3B6F"/>
                 </a:solidFill>
                 <a:latin typeface="Amiri" pitchFamily="2" charset="-78"/>
+                <a:ea typeface="Amiri" pitchFamily="2" charset="-78"/>
                 <a:cs typeface="Amiri" pitchFamily="2" charset="-78"/>
               </a:rPr>
               <a:t>رَأْيُكَ فِي الخِدْمَةِ (كَلِمَةٌ)</a:t>
@@ -22233,6 +22366,7 @@
                   <a:srgbClr val="1B3B6F"/>
                 </a:solidFill>
                 <a:latin typeface="Amiri" pitchFamily="2" charset="-78"/>
+                <a:ea typeface="Amiri" pitchFamily="2" charset="-78"/>
                 <a:cs typeface="Amiri" pitchFamily="2" charset="-78"/>
               </a:rPr>
               <a:t>نَعَمْ، سَأَرْجِعُ لِأَنَّ الطَّعَامَ لَذِيذٌ وَالأَسْعَارَ مَعْقُولَةٌ.</a:t>
@@ -22271,6 +22405,7 @@
                   <a:srgbClr val="1B3B6F"/>
                 </a:solidFill>
                 <a:latin typeface="Amiri" pitchFamily="2" charset="-78"/>
+                <a:ea typeface="Amiri" pitchFamily="2" charset="-78"/>
                 <a:cs typeface="Amiri" pitchFamily="2" charset="-78"/>
               </a:rPr>
               <a:t>جُمْلَةٌ: هَلْ سَتَرْجِعُ؟ وَلِمَاذَا؟</a:t>
@@ -22480,6 +22615,7 @@
                   <a:srgbClr val="D4AF37"/>
                 </a:solidFill>
                 <a:latin typeface="Amiri" pitchFamily="2" charset="-78"/>
+                <a:ea typeface="Amiri" pitchFamily="2" charset="-78"/>
                 <a:cs typeface="Amiri" pitchFamily="2" charset="-78"/>
               </a:rPr>
               <a:t>م</a:t>
@@ -22800,6 +22936,7 @@
                   <a:srgbClr val="8A6D1E"/>
                 </a:solidFill>
                 <a:latin typeface="Amiri" pitchFamily="2" charset="-78"/>
+                <a:ea typeface="Amiri" pitchFamily="2" charset="-78"/>
                 <a:cs typeface="Amiri" pitchFamily="2" charset="-78"/>
               </a:rPr>
               <a:t>رِسَالَةٌ عَنْ مَطْعَمٍ</a:t>
@@ -23275,6 +23412,7 @@
                   <a:srgbClr val="1B3B6F"/>
                 </a:solidFill>
                 <a:latin typeface="Amiri" pitchFamily="2" charset="-78"/>
+                <a:ea typeface="Amiri" pitchFamily="2" charset="-78"/>
                 <a:cs typeface="Amiri" pitchFamily="2" charset="-78"/>
               </a:rPr>
               <a:t>ذَهَبْتُ إِلَى مَطْعَمٍ … مَعَ …</a:t>
@@ -23351,6 +23489,7 @@
                   <a:srgbClr val="1B3B6F"/>
                 </a:solidFill>
                 <a:latin typeface="Amiri" pitchFamily="2" charset="-78"/>
+                <a:ea typeface="Amiri" pitchFamily="2" charset="-78"/>
                 <a:cs typeface="Amiri" pitchFamily="2" charset="-78"/>
               </a:rPr>
               <a:t>طَلَبْتُ … وَشَرِبْتُ …</a:t>
@@ -23427,6 +23566,7 @@
                   <a:srgbClr val="1B3B6F"/>
                 </a:solidFill>
                 <a:latin typeface="Amiri" pitchFamily="2" charset="-78"/>
+                <a:ea typeface="Amiri" pitchFamily="2" charset="-78"/>
                 <a:cs typeface="Amiri" pitchFamily="2" charset="-78"/>
               </a:rPr>
               <a:t>دَفَعْنَا … جُنَيْهًا</a:t>
@@ -23503,6 +23643,7 @@
                   <a:srgbClr val="1B3B6F"/>
                 </a:solidFill>
                 <a:latin typeface="Amiri" pitchFamily="2" charset="-78"/>
+                <a:ea typeface="Amiri" pitchFamily="2" charset="-78"/>
                 <a:cs typeface="Amiri" pitchFamily="2" charset="-78"/>
               </a:rPr>
               <a:t>فِي المَرَّةِ القَادِمَةِ سَأُجَرِّبُ …</a:t>
@@ -23674,6 +23815,7 @@
                   <a:srgbClr val="D4AF37"/>
                 </a:solidFill>
                 <a:latin typeface="Amiri" pitchFamily="2" charset="-78"/>
+                <a:ea typeface="Amiri" pitchFamily="2" charset="-78"/>
                 <a:cs typeface="Amiri" pitchFamily="2" charset="-78"/>
               </a:rPr>
               <a:t>م</a:t>
@@ -23994,6 +24136,7 @@
                   <a:srgbClr val="8A6D1E"/>
                 </a:solidFill>
                 <a:latin typeface="Amiri" pitchFamily="2" charset="-78"/>
+                <a:ea typeface="Amiri" pitchFamily="2" charset="-78"/>
                 <a:cs typeface="Amiri" pitchFamily="2" charset="-78"/>
               </a:rPr>
               <a:t>نَصُّ السُّؤَالِ</a:t>
@@ -24274,6 +24417,7 @@
                   <a:srgbClr val="1B3B6F"/>
                 </a:solidFill>
                 <a:latin typeface="Amiri" pitchFamily="2" charset="-78"/>
+                <a:ea typeface="Amiri" pitchFamily="2" charset="-78"/>
                 <a:cs typeface="Amiri" pitchFamily="2" charset="-78"/>
               </a:rPr>
               <a:t>اكْتُبْ رِسَالَةً إِلِكْتِرُونِيَّةً إِلَى صَدِيقٍ عَنْ وَجْبَةٍ تَنَاوَلْتَهَا فِي مَطْعَمٍ (٨٠–٩٠ كَلِمَةً).</a:t>
@@ -24415,6 +24559,7 @@
                   <a:srgbClr val="1B3B6F"/>
                 </a:solidFill>
                 <a:latin typeface="Amiri" pitchFamily="2" charset="-78"/>
+                <a:ea typeface="Amiri" pitchFamily="2" charset="-78"/>
                 <a:cs typeface="Amiri" pitchFamily="2" charset="-78"/>
               </a:rPr>
               <a:t>أَيْنَ ذَهَبْتَ، وَمَتَى، وَمَعَ مَنْ؟</a:t>
@@ -24556,6 +24701,7 @@
                   <a:srgbClr val="1B3B6F"/>
                 </a:solidFill>
                 <a:latin typeface="Amiri" pitchFamily="2" charset="-78"/>
+                <a:ea typeface="Amiri" pitchFamily="2" charset="-78"/>
                 <a:cs typeface="Amiri" pitchFamily="2" charset="-78"/>
               </a:rPr>
               <a:t>مَاذَا طَلَبْتَ، وَكَمْ دَفَعْتَ؟</a:t>
@@ -24697,6 +24843,7 @@
                   <a:srgbClr val="1B3B6F"/>
                 </a:solidFill>
                 <a:latin typeface="Amiri" pitchFamily="2" charset="-78"/>
+                <a:ea typeface="Amiri" pitchFamily="2" charset="-78"/>
                 <a:cs typeface="Amiri" pitchFamily="2" charset="-78"/>
               </a:rPr>
               <a:t>مَا رَأْيُكَ فِي الطَّعَامِ وَالخِدْمَةِ؟</a:t>
@@ -24838,6 +24985,7 @@
                   <a:srgbClr val="1B3B6F"/>
                 </a:solidFill>
                 <a:latin typeface="Amiri" pitchFamily="2" charset="-78"/>
+                <a:ea typeface="Amiri" pitchFamily="2" charset="-78"/>
                 <a:cs typeface="Amiri" pitchFamily="2" charset="-78"/>
               </a:rPr>
               <a:t>هَلْ سَتَرْجِعُ؟ وَمَاذَا سَتَطْلُبُ فِي المَرَّةِ القَادِمَةِ؟</a:t>
@@ -25047,6 +25195,7 @@
                   <a:srgbClr val="D4AF37"/>
                 </a:solidFill>
                 <a:latin typeface="Amiri" pitchFamily="2" charset="-78"/>
+                <a:ea typeface="Amiri" pitchFamily="2" charset="-78"/>
                 <a:cs typeface="Amiri" pitchFamily="2" charset="-78"/>
               </a:rPr>
               <a:t>م</a:t>
@@ -25367,6 +25516,7 @@
                   <a:srgbClr val="8A6D1E"/>
                 </a:solidFill>
                 <a:latin typeface="Amiri" pitchFamily="2" charset="-78"/>
+                <a:ea typeface="Amiri" pitchFamily="2" charset="-78"/>
                 <a:cs typeface="Amiri" pitchFamily="2" charset="-78"/>
               </a:rPr>
               <a:t>قَوَالِبُ الكِتَابَةِ</a:t>
@@ -25647,6 +25797,7 @@
                   <a:srgbClr val="1B3B6F"/>
                 </a:solidFill>
                 <a:latin typeface="Amiri" pitchFamily="2" charset="-78"/>
+                <a:ea typeface="Amiri" pitchFamily="2" charset="-78"/>
                 <a:cs typeface="Amiri" pitchFamily="2" charset="-78"/>
               </a:rPr>
               <a:t>مَرْحَبًا يَا ______ ، كَيْفَ حَالُكَ؟</a:t>
@@ -25853,6 +26004,7 @@
                   <a:srgbClr val="1B3B6F"/>
                 </a:solidFill>
                 <a:latin typeface="Amiri" pitchFamily="2" charset="-78"/>
+                <a:ea typeface="Amiri" pitchFamily="2" charset="-78"/>
                 <a:cs typeface="Amiri" pitchFamily="2" charset="-78"/>
               </a:rPr>
               <a:t>يَوْمَ ______ ذَهَبْتُ إِلَى مَطْعَمٍ ______ مَعَ ______ .</a:t>
@@ -26059,6 +26211,7 @@
                   <a:srgbClr val="1B3B6F"/>
                 </a:solidFill>
                 <a:latin typeface="Amiri" pitchFamily="2" charset="-78"/>
+                <a:ea typeface="Amiri" pitchFamily="2" charset="-78"/>
                 <a:cs typeface="Amiri" pitchFamily="2" charset="-78"/>
               </a:rPr>
               <a:t>طَلَبْتُ ______ وَشَرِبْتُ ______ . دَفَعْنَا ______ جُنَيْهًا.</a:t>
@@ -26265,6 +26418,7 @@
                   <a:srgbClr val="1B3B6F"/>
                 </a:solidFill>
                 <a:latin typeface="Amiri" pitchFamily="2" charset="-78"/>
+                <a:ea typeface="Amiri" pitchFamily="2" charset="-78"/>
                 <a:cs typeface="Amiri" pitchFamily="2" charset="-78"/>
               </a:rPr>
               <a:t>كَانَ الطَّعَامُ ______ ، لٰكِنَّ ______ .</a:t>
@@ -26471,6 +26625,7 @@
                   <a:srgbClr val="1B3B6F"/>
                 </a:solidFill>
                 <a:latin typeface="Amiri" pitchFamily="2" charset="-78"/>
+                <a:ea typeface="Amiri" pitchFamily="2" charset="-78"/>
                 <a:cs typeface="Amiri" pitchFamily="2" charset="-78"/>
               </a:rPr>
               <a:t>سَأَرْجِعُ قَرِيبًا، وَسَأَطْلُبُ ______ .</a:t>
@@ -26677,6 +26832,7 @@
                   <a:srgbClr val="1B3B6F"/>
                 </a:solidFill>
                 <a:latin typeface="Amiri" pitchFamily="2" charset="-78"/>
+                <a:ea typeface="Amiri" pitchFamily="2" charset="-78"/>
                 <a:cs typeface="Amiri" pitchFamily="2" charset="-78"/>
               </a:rPr>
               <a:t>إِلَى اللِّقَاءِ، ______</a:t>
@@ -26916,13 +27072,9 @@
     <a:fontScheme name="Office">
       <a:majorFont>
         <a:latin typeface="Calibri Light" panose="020F0302020204030204"/>
-        <a:ea typeface=""/>
-        <a:cs typeface=""/>
-        <a:font script="Jpan" typeface="游ゴシック Light"/>
-        <a:font script="Hang" typeface="맑은 고딕"/>
-        <a:font script="Hans" typeface="等线 Light"/>
-        <a:font script="Hant" typeface="新細明體"/>
-        <a:font script="Arab" typeface="Times New Roman"/>
+        <a:ea typeface="Amiri" pitchFamily="2" charset="-78"/>
+        <a:cs typeface="Amiri" pitchFamily="2" charset="-78"/>
+        <a:font script="Arab" typeface="Amiri"/>
         <a:font script="Hebr" typeface="Times New Roman"/>
         <a:font script="Thai" typeface="Angsana New"/>
         <a:font script="Ethi" typeface="Nyala"/>
@@ -26968,13 +27120,9 @@
       </a:majorFont>
       <a:minorFont>
         <a:latin typeface="Calibri" panose="020F0502020204030204"/>
-        <a:ea typeface=""/>
-        <a:cs typeface=""/>
-        <a:font script="Jpan" typeface="游ゴシック"/>
-        <a:font script="Hang" typeface="맑은 고딕"/>
-        <a:font script="Hans" typeface="等线"/>
-        <a:font script="Hant" typeface="新細明體"/>
-        <a:font script="Arab" typeface="Arial"/>
+        <a:ea typeface="Amiri" pitchFamily="2" charset="-78"/>
+        <a:cs typeface="Amiri" pitchFamily="2" charset="-78"/>
+        <a:font script="Arab" typeface="Amiri"/>
         <a:font script="Hebr" typeface="Arial"/>
         <a:font script="Thai" typeface="Cordia New"/>
         <a:font script="Ethi" typeface="Nyala"/>

--- a/Topic_A/Exam_Practice/AT-A-L05_Writing_Workshop_Eating_Out_Cafe_Menu_and_Prices.pptx
+++ b/Topic_A/Exam_Practice/AT-A-L05_Writing_Workshop_Eating_Out_Cafe_Menu_and_Prices.pptx
@@ -3852,7 +3852,7 @@
                 <a:solidFill>
                   <a:srgbClr val="FFFFFF"/>
                 </a:solidFill>
-                <a:latin typeface="Calibri" pitchFamily="34" charset="0"/>
+                <a:latin typeface="Amiri" pitchFamily="2" charset="-78"/>
                 <a:ea typeface="Amiri" pitchFamily="2" charset="-78"/>
                 <a:cs typeface="Amiri" pitchFamily="2" charset="-78"/>
               </a:rPr>
@@ -3918,7 +3918,7 @@
                 <a:solidFill>
                   <a:srgbClr val="FFFFFF"/>
                 </a:solidFill>
-                <a:latin typeface="Calibri" pitchFamily="34" charset="0"/>
+                <a:latin typeface="Amiri" pitchFamily="2" charset="-78"/>
                 <a:ea typeface="Amiri" pitchFamily="2" charset="-78"/>
                 <a:cs typeface="Amiri" pitchFamily="2" charset="-78"/>
               </a:rPr>
@@ -3984,7 +3984,7 @@
                 <a:solidFill>
                   <a:srgbClr val="FFFFFF"/>
                 </a:solidFill>
-                <a:latin typeface="Calibri" pitchFamily="34" charset="0"/>
+                <a:latin typeface="Amiri" pitchFamily="2" charset="-78"/>
                 <a:ea typeface="Amiri" pitchFamily="2" charset="-78"/>
                 <a:cs typeface="Amiri" pitchFamily="2" charset="-78"/>
               </a:rPr>
@@ -4050,7 +4050,7 @@
                 <a:solidFill>
                   <a:srgbClr val="FFFFFF"/>
                 </a:solidFill>
-                <a:latin typeface="Calibri" pitchFamily="34" charset="0"/>
+                <a:latin typeface="Amiri" pitchFamily="2" charset="-78"/>
                 <a:ea typeface="Amiri" pitchFamily="2" charset="-78"/>
                 <a:cs typeface="Amiri" pitchFamily="2" charset="-78"/>
               </a:rPr>
@@ -4848,7 +4848,7 @@
                 <a:solidFill>
                   <a:srgbClr val="FFFFFF"/>
                 </a:solidFill>
-                <a:latin typeface="Calibri" pitchFamily="34" charset="0"/>
+                <a:latin typeface="Amiri" pitchFamily="2" charset="-78"/>
                 <a:ea typeface="Amiri" pitchFamily="2" charset="-78"/>
                 <a:cs typeface="Amiri" pitchFamily="2" charset="-78"/>
               </a:rPr>
@@ -4914,7 +4914,7 @@
                 <a:solidFill>
                   <a:srgbClr val="FFFFFF"/>
                 </a:solidFill>
-                <a:latin typeface="Calibri" pitchFamily="34" charset="0"/>
+                <a:latin typeface="Amiri" pitchFamily="2" charset="-78"/>
                 <a:ea typeface="Amiri" pitchFamily="2" charset="-78"/>
                 <a:cs typeface="Amiri" pitchFamily="2" charset="-78"/>
               </a:rPr>
@@ -4980,7 +4980,7 @@
                 <a:solidFill>
                   <a:srgbClr val="FFFFFF"/>
                 </a:solidFill>
-                <a:latin typeface="Calibri" pitchFamily="34" charset="0"/>
+                <a:latin typeface="Amiri" pitchFamily="2" charset="-78"/>
                 <a:ea typeface="Amiri" pitchFamily="2" charset="-78"/>
                 <a:cs typeface="Amiri" pitchFamily="2" charset="-78"/>
               </a:rPr>
@@ -5046,7 +5046,7 @@
                 <a:solidFill>
                   <a:srgbClr val="FFFFFF"/>
                 </a:solidFill>
-                <a:latin typeface="Calibri" pitchFamily="34" charset="0"/>
+                <a:latin typeface="Amiri" pitchFamily="2" charset="-78"/>
                 <a:ea typeface="Amiri" pitchFamily="2" charset="-78"/>
                 <a:cs typeface="Amiri" pitchFamily="2" charset="-78"/>
               </a:rPr>
@@ -8606,7 +8606,7 @@
                 <a:solidFill>
                   <a:srgbClr val="FFFFFF"/>
                 </a:solidFill>
-                <a:latin typeface="Calibri" pitchFamily="34" charset="0"/>
+                <a:latin typeface="Amiri" pitchFamily="2" charset="-78"/>
                 <a:ea typeface="Amiri" pitchFamily="2" charset="-78"/>
                 <a:cs typeface="Amiri" pitchFamily="2" charset="-78"/>
               </a:rPr>
@@ -8672,7 +8672,7 @@
                 <a:solidFill>
                   <a:srgbClr val="FFFFFF"/>
                 </a:solidFill>
-                <a:latin typeface="Calibri" pitchFamily="34" charset="0"/>
+                <a:latin typeface="Amiri" pitchFamily="2" charset="-78"/>
                 <a:ea typeface="Amiri" pitchFamily="2" charset="-78"/>
                 <a:cs typeface="Amiri" pitchFamily="2" charset="-78"/>
               </a:rPr>
@@ -8738,7 +8738,7 @@
                 <a:solidFill>
                   <a:srgbClr val="FFFFFF"/>
                 </a:solidFill>
-                <a:latin typeface="Calibri" pitchFamily="34" charset="0"/>
+                <a:latin typeface="Amiri" pitchFamily="2" charset="-78"/>
                 <a:ea typeface="Amiri" pitchFamily="2" charset="-78"/>
                 <a:cs typeface="Amiri" pitchFamily="2" charset="-78"/>
               </a:rPr>
@@ -8804,7 +8804,7 @@
                 <a:solidFill>
                   <a:srgbClr val="FFFFFF"/>
                 </a:solidFill>
-                <a:latin typeface="Calibri" pitchFamily="34" charset="0"/>
+                <a:latin typeface="Amiri" pitchFamily="2" charset="-78"/>
                 <a:ea typeface="Amiri" pitchFamily="2" charset="-78"/>
                 <a:cs typeface="Amiri" pitchFamily="2" charset="-78"/>
               </a:rPr>
@@ -9591,7 +9591,7 @@
                 <a:solidFill>
                   <a:srgbClr val="FFFFFF"/>
                 </a:solidFill>
-                <a:latin typeface="Calibri" pitchFamily="34" charset="0"/>
+                <a:latin typeface="Amiri" pitchFamily="2" charset="-78"/>
                 <a:ea typeface="Amiri" pitchFamily="2" charset="-78"/>
                 <a:cs typeface="Amiri" pitchFamily="2" charset="-78"/>
               </a:rPr>
@@ -9657,7 +9657,7 @@
                 <a:solidFill>
                   <a:srgbClr val="FFFFFF"/>
                 </a:solidFill>
-                <a:latin typeface="Calibri" pitchFamily="34" charset="0"/>
+                <a:latin typeface="Amiri" pitchFamily="2" charset="-78"/>
                 <a:ea typeface="Amiri" pitchFamily="2" charset="-78"/>
                 <a:cs typeface="Amiri" pitchFamily="2" charset="-78"/>
               </a:rPr>
@@ -9723,7 +9723,7 @@
                 <a:solidFill>
                   <a:srgbClr val="FFFFFF"/>
                 </a:solidFill>
-                <a:latin typeface="Calibri" pitchFamily="34" charset="0"/>
+                <a:latin typeface="Amiri" pitchFamily="2" charset="-78"/>
                 <a:ea typeface="Amiri" pitchFamily="2" charset="-78"/>
                 <a:cs typeface="Amiri" pitchFamily="2" charset="-78"/>
               </a:rPr>
@@ -9789,7 +9789,7 @@
                 <a:solidFill>
                   <a:srgbClr val="FFFFFF"/>
                 </a:solidFill>
-                <a:latin typeface="Calibri" pitchFamily="34" charset="0"/>
+                <a:latin typeface="Amiri" pitchFamily="2" charset="-78"/>
                 <a:ea typeface="Amiri" pitchFamily="2" charset="-78"/>
                 <a:cs typeface="Amiri" pitchFamily="2" charset="-78"/>
               </a:rPr>
@@ -10576,7 +10576,7 @@
                 <a:solidFill>
                   <a:srgbClr val="FFFFFF"/>
                 </a:solidFill>
-                <a:latin typeface="Calibri" pitchFamily="34" charset="0"/>
+                <a:latin typeface="Amiri" pitchFamily="2" charset="-78"/>
                 <a:ea typeface="Amiri" pitchFamily="2" charset="-78"/>
                 <a:cs typeface="Amiri" pitchFamily="2" charset="-78"/>
               </a:rPr>
@@ -10642,7 +10642,7 @@
                 <a:solidFill>
                   <a:srgbClr val="FFFFFF"/>
                 </a:solidFill>
-                <a:latin typeface="Calibri" pitchFamily="34" charset="0"/>
+                <a:latin typeface="Amiri" pitchFamily="2" charset="-78"/>
                 <a:ea typeface="Amiri" pitchFamily="2" charset="-78"/>
                 <a:cs typeface="Amiri" pitchFamily="2" charset="-78"/>
               </a:rPr>
@@ -10708,7 +10708,7 @@
                 <a:solidFill>
                   <a:srgbClr val="FFFFFF"/>
                 </a:solidFill>
-                <a:latin typeface="Calibri" pitchFamily="34" charset="0"/>
+                <a:latin typeface="Amiri" pitchFamily="2" charset="-78"/>
                 <a:ea typeface="Amiri" pitchFamily="2" charset="-78"/>
                 <a:cs typeface="Amiri" pitchFamily="2" charset="-78"/>
               </a:rPr>
@@ -10774,7 +10774,7 @@
                 <a:solidFill>
                   <a:srgbClr val="FFFFFF"/>
                 </a:solidFill>
-                <a:latin typeface="Calibri" pitchFamily="34" charset="0"/>
+                <a:latin typeface="Amiri" pitchFamily="2" charset="-78"/>
                 <a:ea typeface="Amiri" pitchFamily="2" charset="-78"/>
                 <a:cs typeface="Amiri" pitchFamily="2" charset="-78"/>
               </a:rPr>
